--- a/maven_training/source_material/course_portal/downloads/mss_platform_overview.pptx
+++ b/maven_training/source_material/course_portal/downloads/mss_platform_overview.pptx
@@ -3139,8 +3139,8 @@
         </p:nvSpPr>
         <p:spPr>
           <a:xfrm>
-            <a:off x="0" y="6574536"/>
-            <a:ext cx="11140702" cy="283464"/>
+            <a:off x="0" y="6720840"/>
+            <a:ext cx="11140702" cy="137160"/>
           </a:xfrm>
           <a:prstGeom prst="rect">
             <a:avLst/>
@@ -3155,7 +3155,7 @@
           <a:p>
             <a:pPr algn="l"/>
             <a:r>
-              <a:rPr sz="800" b="0">
+              <a:rPr sz="700" b="0">
                 <a:solidFill>
                   <a:srgbClr val="18335F"/>
                 </a:solidFill>
@@ -3404,8 +3404,8 @@
         </p:nvSpPr>
         <p:spPr>
           <a:xfrm>
-            <a:off x="0" y="6574536"/>
-            <a:ext cx="11140702" cy="283464"/>
+            <a:off x="0" y="6720840"/>
+            <a:ext cx="11140702" cy="137160"/>
           </a:xfrm>
           <a:prstGeom prst="rect">
             <a:avLst/>
@@ -3420,7 +3420,7 @@
           <a:p>
             <a:pPr algn="l"/>
             <a:r>
-              <a:rPr sz="800" b="0">
+              <a:rPr sz="700" b="0">
                 <a:solidFill>
                   <a:srgbClr val="18335F"/>
                 </a:solidFill>
@@ -3781,8 +3781,8 @@
         </p:nvSpPr>
         <p:spPr>
           <a:xfrm>
-            <a:off x="0" y="6574536"/>
-            <a:ext cx="11140702" cy="283464"/>
+            <a:off x="0" y="6720840"/>
+            <a:ext cx="11140702" cy="137160"/>
           </a:xfrm>
           <a:prstGeom prst="rect">
             <a:avLst/>
@@ -3797,7 +3797,7 @@
           <a:p>
             <a:pPr algn="l"/>
             <a:r>
-              <a:rPr sz="800" b="0">
+              <a:rPr sz="700" b="0">
                 <a:solidFill>
                   <a:srgbClr val="18335F"/>
                 </a:solidFill>
@@ -4608,8 +4608,8 @@
         </p:nvSpPr>
         <p:spPr>
           <a:xfrm>
-            <a:off x="0" y="6574536"/>
-            <a:ext cx="11140702" cy="283464"/>
+            <a:off x="0" y="6720840"/>
+            <a:ext cx="11140702" cy="137160"/>
           </a:xfrm>
           <a:prstGeom prst="rect">
             <a:avLst/>
@@ -4624,7 +4624,7 @@
           <a:p>
             <a:pPr algn="l"/>
             <a:r>
-              <a:rPr sz="800" b="0">
+              <a:rPr sz="700" b="0">
                 <a:solidFill>
                   <a:srgbClr val="18335F"/>
                 </a:solidFill>
@@ -5342,8 +5342,8 @@
         </p:nvSpPr>
         <p:spPr>
           <a:xfrm>
-            <a:off x="0" y="6574536"/>
-            <a:ext cx="11140702" cy="283464"/>
+            <a:off x="0" y="6720840"/>
+            <a:ext cx="11140702" cy="137160"/>
           </a:xfrm>
           <a:prstGeom prst="rect">
             <a:avLst/>
@@ -5358,7 +5358,7 @@
           <a:p>
             <a:pPr algn="l"/>
             <a:r>
-              <a:rPr sz="800" b="0">
+              <a:rPr sz="700" b="0">
                 <a:solidFill>
                   <a:srgbClr val="18335F"/>
                 </a:solidFill>
@@ -6222,8 +6222,8 @@
         </p:nvSpPr>
         <p:spPr>
           <a:xfrm>
-            <a:off x="0" y="6574536"/>
-            <a:ext cx="11140702" cy="283464"/>
+            <a:off x="0" y="6720840"/>
+            <a:ext cx="11140702" cy="137160"/>
           </a:xfrm>
           <a:prstGeom prst="rect">
             <a:avLst/>
@@ -6238,7 +6238,7 @@
           <a:p>
             <a:pPr algn="l"/>
             <a:r>
-              <a:rPr sz="800" b="0">
+              <a:rPr sz="700" b="0">
                 <a:solidFill>
                   <a:srgbClr val="18335F"/>
                 </a:solidFill>
@@ -6986,8 +6986,8 @@
         </p:nvSpPr>
         <p:spPr>
           <a:xfrm>
-            <a:off x="0" y="6574536"/>
-            <a:ext cx="11140702" cy="283464"/>
+            <a:off x="0" y="6720840"/>
+            <a:ext cx="11140702" cy="137160"/>
           </a:xfrm>
           <a:prstGeom prst="rect">
             <a:avLst/>
@@ -7002,7 +7002,7 @@
           <a:p>
             <a:pPr algn="l"/>
             <a:r>
-              <a:rPr sz="800" b="0">
+              <a:rPr sz="700" b="0">
                 <a:solidFill>
                   <a:srgbClr val="18335F"/>
                 </a:solidFill>
@@ -7767,8 +7767,8 @@
         </p:nvSpPr>
         <p:spPr>
           <a:xfrm>
-            <a:off x="0" y="6574536"/>
-            <a:ext cx="11140702" cy="283464"/>
+            <a:off x="0" y="6720840"/>
+            <a:ext cx="11140702" cy="137160"/>
           </a:xfrm>
           <a:prstGeom prst="rect">
             <a:avLst/>
@@ -7783,7 +7783,7 @@
           <a:p>
             <a:pPr algn="l"/>
             <a:r>
-              <a:rPr sz="800" b="0">
+              <a:rPr sz="700" b="0">
                 <a:solidFill>
                   <a:srgbClr val="18335F"/>
                 </a:solidFill>
@@ -8644,8 +8644,8 @@
         </p:nvSpPr>
         <p:spPr>
           <a:xfrm>
-            <a:off x="0" y="6574536"/>
-            <a:ext cx="11140702" cy="283464"/>
+            <a:off x="0" y="6720840"/>
+            <a:ext cx="11140702" cy="137160"/>
           </a:xfrm>
           <a:prstGeom prst="rect">
             <a:avLst/>
@@ -8660,7 +8660,7 @@
           <a:p>
             <a:pPr algn="l"/>
             <a:r>
-              <a:rPr sz="800" b="0">
+              <a:rPr sz="700" b="0">
                 <a:solidFill>
                   <a:srgbClr val="18335F"/>
                 </a:solidFill>
@@ -9445,8 +9445,8 @@
         </p:nvSpPr>
         <p:spPr>
           <a:xfrm>
-            <a:off x="0" y="6574536"/>
-            <a:ext cx="11140702" cy="283464"/>
+            <a:off x="0" y="6720840"/>
+            <a:ext cx="11140702" cy="137160"/>
           </a:xfrm>
           <a:prstGeom prst="rect">
             <a:avLst/>
@@ -9461,7 +9461,7 @@
           <a:p>
             <a:pPr algn="l"/>
             <a:r>
-              <a:rPr sz="800" b="0">
+              <a:rPr sz="700" b="0">
                 <a:solidFill>
                   <a:srgbClr val="18335F"/>
                 </a:solidFill>
